--- a/generated_ppts/deep_learning_presentation.pptx
+++ b/generated_ppts/deep_learning_presentation.pptx
@@ -3129,7 +3129,7 @@
                   <a:srgbClr val="FFFFFF"/>
                 </a:solidFill>
               </a:rPr>
-              <a:t>Create  A Ppt Of 6 Deep Learning</a:t>
+              <a:t>Deep Learning</a:t>
             </a:r>
           </a:p>
         </p:txBody>
@@ -3205,7 +3205,7 @@
                   <a:srgbClr val="FFFFFF"/>
                 </a:solidFill>
               </a:rPr>
-              <a:t>Introduction To Deep Learning</a:t>
+              <a:t>Deep Learning Intro</a:t>
             </a:r>
           </a:p>
         </p:txBody>
@@ -3238,7 +3238,7 @@
                   <a:srgbClr val="FFFFFF"/>
                 </a:solidFill>
               </a:rPr>
-              <a:t>Deep learning is a subset of machine learning that uses neural networks</a:t>
+              <a:t>Deep learning is a subset of machine learning</a:t>
             </a:r>
           </a:p>
           <a:p>
@@ -3255,7 +3255,7 @@
                   <a:srgbClr val="FFFFFF"/>
                 </a:solidFill>
               </a:rPr>
-              <a:t>Neural networks are modeled after the human brain</a:t>
+              <a:t>Uses neural networks to analyze data</a:t>
             </a:r>
           </a:p>
           <a:p>
@@ -3272,7 +3272,24 @@
                   <a:srgbClr val="FFFFFF"/>
                 </a:solidFill>
               </a:rPr>
-              <a:t>Deep learning can learn from large amounts of data</a:t>
+              <a:t> Enables machines to learn from data</a:t>
+            </a:r>
+          </a:p>
+          <a:p>
+            <a:pPr>
+              <a:defRPr sz="1500" b="0">
+                <a:solidFill>
+                  <a:srgbClr val="FFFFFF"/>
+                </a:solidFill>
+              </a:defRPr>
+            </a:pPr>
+            <a:r>
+              <a:rPr sz="1500" b="0">
+                <a:solidFill>
+                  <a:srgbClr val="FFFFFF"/>
+                </a:solidFill>
+              </a:rPr>
+              <a:t>Improves accuracy over time</a:t>
             </a:r>
           </a:p>
         </p:txBody>
@@ -3331,7 +3348,7 @@
                   <a:srgbClr val="FFFFFF"/>
                 </a:solidFill>
               </a:rPr>
-              <a:t>Types Of Deep Learning</a:t>
+              <a:t>Neural Networks</a:t>
             </a:r>
           </a:p>
         </p:txBody>
@@ -3364,7 +3381,7 @@
                   <a:srgbClr val="FFFFFF"/>
                 </a:solidFill>
               </a:rPr>
-              <a:t>Supervised learning uses labeled data to train models</a:t>
+              <a:t>Mimic the human brain</a:t>
             </a:r>
           </a:p>
           <a:p>
@@ -3381,7 +3398,7 @@
                   <a:srgbClr val="FFFFFF"/>
                 </a:solidFill>
               </a:rPr>
-              <a:t>Unsupervised learning uses unlabeled data to discover patterns</a:t>
+              <a:t>Consist of layers of interconnected nodes</a:t>
             </a:r>
           </a:p>
           <a:p>
@@ -3398,7 +3415,24 @@
                   <a:srgbClr val="FFFFFF"/>
                 </a:solidFill>
               </a:rPr>
-              <a:t>Reinforcement learning uses rewards to train models</a:t>
+              <a:t>Can learn complex patterns in data</a:t>
+            </a:r>
+          </a:p>
+          <a:p>
+            <a:pPr>
+              <a:defRPr sz="1500" b="0">
+                <a:solidFill>
+                  <a:srgbClr val="FFFFFF"/>
+                </a:solidFill>
+              </a:defRPr>
+            </a:pPr>
+            <a:r>
+              <a:rPr sz="1500" b="0">
+                <a:solidFill>
+                  <a:srgbClr val="FFFFFF"/>
+                </a:solidFill>
+              </a:rPr>
+              <a:t>Key to deep learning</a:t>
             </a:r>
           </a:p>
         </p:txBody>
@@ -3457,7 +3491,7 @@
                   <a:srgbClr val="FFFFFF"/>
                 </a:solidFill>
               </a:rPr>
-              <a:t>Deep Learning Applications</a:t>
+              <a:t>Machine Learning</a:t>
             </a:r>
           </a:p>
         </p:txBody>
@@ -3490,7 +3524,7 @@
                   <a:srgbClr val="FFFFFF"/>
                 </a:solidFill>
               </a:rPr>
-              <a:t>Image recognition and classification</a:t>
+              <a:t>Enables machines to learn from data</a:t>
             </a:r>
           </a:p>
           <a:p>
@@ -3507,7 +3541,7 @@
                   <a:srgbClr val="FFFFFF"/>
                 </a:solidFill>
               </a:rPr>
-              <a:t>Natural language processing and speech recognition</a:t>
+              <a:t>Includes deep learning and other techniques</a:t>
             </a:r>
           </a:p>
           <a:p>
@@ -3524,7 +3558,24 @@
                   <a:srgbClr val="FFFFFF"/>
                 </a:solidFill>
               </a:rPr>
-              <a:t>Game playing and decision making</a:t>
+              <a:t>Improves prediction and decision-making</a:t>
+            </a:r>
+          </a:p>
+          <a:p>
+            <a:pPr>
+              <a:defRPr sz="1500" b="0">
+                <a:solidFill>
+                  <a:srgbClr val="FFFFFF"/>
+                </a:solidFill>
+              </a:defRPr>
+            </a:pPr>
+            <a:r>
+              <a:rPr sz="1500" b="0">
+                <a:solidFill>
+                  <a:srgbClr val="FFFFFF"/>
+                </a:solidFill>
+              </a:rPr>
+              <a:t>Applies to various domains</a:t>
             </a:r>
           </a:p>
         </p:txBody>
@@ -3583,7 +3634,7 @@
                   <a:srgbClr val="FFFFFF"/>
                 </a:solidFill>
               </a:rPr>
-              <a:t>How Neural Networks Work</a:t>
+              <a:t>Image Classification</a:t>
             </a:r>
           </a:p>
         </p:txBody>
@@ -3616,7 +3667,7 @@
                   <a:srgbClr val="FFFFFF"/>
                 </a:solidFill>
               </a:rPr>
-              <a:t>Neural networks consist of layers of interconnected nodes</a:t>
+              <a:t>Uses deep learning to classify images</a:t>
             </a:r>
           </a:p>
           <a:p>
@@ -3633,7 +3684,7 @@
                   <a:srgbClr val="FFFFFF"/>
                 </a:solidFill>
               </a:rPr>
-              <a:t>Each node applies a non-linear transformation to the input data</a:t>
+              <a:t>Applies to object detection and recognition</a:t>
             </a:r>
           </a:p>
           <a:p>
@@ -3650,7 +3701,24 @@
                   <a:srgbClr val="FFFFFF"/>
                 </a:solidFill>
               </a:rPr>
-              <a:t>The output of each node is passed to the next layer</a:t>
+              <a:t>Improves accuracy with large datasets</a:t>
+            </a:r>
+          </a:p>
+          <a:p>
+            <a:pPr>
+              <a:defRPr sz="1500" b="0">
+                <a:solidFill>
+                  <a:srgbClr val="FFFFFF"/>
+                </a:solidFill>
+              </a:defRPr>
+            </a:pPr>
+            <a:r>
+              <a:rPr sz="1500" b="0">
+                <a:solidFill>
+                  <a:srgbClr val="FFFFFF"/>
+                </a:solidFill>
+              </a:rPr>
+              <a:t>Enables applications like self-driving cars</a:t>
             </a:r>
           </a:p>
         </p:txBody>
@@ -3709,7 +3777,7 @@
                   <a:srgbClr val="FFFFFF"/>
                 </a:solidFill>
               </a:rPr>
-              <a:t>Future Of Deep Learning</a:t>
+              <a:t>Natural Language</a:t>
             </a:r>
           </a:p>
         </p:txBody>
@@ -3742,7 +3810,7 @@
                   <a:srgbClr val="FFFFFF"/>
                 </a:solidFill>
               </a:rPr>
-              <a:t>Deep learning has many real-world applications</a:t>
+              <a:t>Uses deep learning to analyze and understand language</a:t>
             </a:r>
           </a:p>
           <a:p>
@@ -3759,7 +3827,7 @@
                   <a:srgbClr val="FFFFFF"/>
                 </a:solidFill>
               </a:rPr>
-              <a:t>It is used in self-driving cars and robotics</a:t>
+              <a:t>Applies to text classification and generation</a:t>
             </a:r>
           </a:p>
           <a:p>
@@ -3776,7 +3844,24 @@
                   <a:srgbClr val="FFFFFF"/>
                 </a:solidFill>
               </a:rPr>
-              <a:t>It is also used in healthcare and finance</a:t>
+              <a:t>Improves language translation and conversation</a:t>
+            </a:r>
+          </a:p>
+          <a:p>
+            <a:pPr>
+              <a:defRPr sz="1500" b="0">
+                <a:solidFill>
+                  <a:srgbClr val="FFFFFF"/>
+                </a:solidFill>
+              </a:defRPr>
+            </a:pPr>
+            <a:r>
+              <a:rPr sz="1500" b="0">
+                <a:solidFill>
+                  <a:srgbClr val="FFFFFF"/>
+                </a:solidFill>
+              </a:rPr>
+              <a:t>Enables applications like chatbots</a:t>
             </a:r>
           </a:p>
         </p:txBody>
